--- a/materials/08_계획서_통계로_PPT만들기/정답_예시/정답_동아리_결과발표_강의안스타일.pptx
+++ b/materials/08_계획서_통계로_PPT만들기/정답_예시/정답_동아리_결과발표_강의안스타일.pptx
@@ -4616,7 +4616,7 @@
                 <a:ea typeface="맑은 고딕"/>
                 <a:cs typeface="맑은 고딕"/>
               </a:rPr>
-              <a:t>오현초등학교 과학진로부  홍길동</a:t>
+              <a:t>오현초등학교 과학진로부  오태민</a:t>
             </a:r>
           </a:p>
         </p:txBody>
